--- a/docs/example4_walkthrough.pptx
+++ b/docs/example4_walkthrough.pptx
@@ -7,7 +7,6 @@
   <p:sldIdLst>
     <p:sldId id="256" r:id="rId7"/>
     <p:sldId id="257" r:id="rId8"/>
-    <p:sldId id="258" r:id="rId9"/>
   </p:sldIdLst>
   <p:sldSz cx="9144000" cy="6858000" type="screen4x3"/>
   <p:notesSz cx="6858000" cy="9144000"/>
@@ -3261,7 +3260,7 @@
                 </a:solidFill>
                 <a:latin typeface="Aptos"/>
               </a:rPr>
-              <a:t> type with two values (</a:t>
+              <a:t> enum type with two values (</a:t>
             </a:r>
             <a:r>
               <a:rPr sz="1600">
@@ -3427,7 +3426,7 @@
                 </a:solidFill>
                 <a:latin typeface="Consolas"/>
               </a:rPr>
-              <a:t>// Mini version of device-envoy's LedLevel derive pattern.</a:t>
+              <a:t>// TECHNIQUE NAME: derive-generated implementation</a:t>
             </a:r>
           </a:p>
           <a:p>
@@ -3442,15 +3441,6 @@
                 <a:spcPts val="0"/>
               </a:spcAft>
             </a:pPr>
-            <a:r>
-              <a:rPr sz="1600">
-                <a:solidFill>
-                  <a:srgbClr val="6A9955"/>
-                </a:solidFill>
-                <a:latin typeface="Consolas"/>
-              </a:rPr>
-              <a:t>// This is not class inheritance; derive generates trait implementations for us.</a:t>
-            </a:r>
           </a:p>
           <a:p>
             <a:pPr>
@@ -3471,7 +3461,25 @@
                 </a:solidFill>
                 <a:latin typeface="Consolas"/>
               </a:rPr>
-              <a:t>//</a:t>
+              <a:t>#[</a:t>
+            </a:r>
+            <a:r>
+              <a:rPr sz="1600">
+                <a:solidFill>
+                  <a:srgbClr val="6A9955"/>
+                </a:solidFill>
+                <a:latin typeface="Consolas"/>
+              </a:rPr>
+              <a:t>derive(Clone, Copy, Debug, Eq, Hash, Ord, PartialEq, PartialOrd, Default)</a:t>
+            </a:r>
+            <a:r>
+              <a:rPr sz="1600">
+                <a:solidFill>
+                  <a:srgbClr val="6A9955"/>
+                </a:solidFill>
+                <a:latin typeface="Consolas"/>
+              </a:rPr>
+              <a:t>]</a:t>
             </a:r>
           </a:p>
           <a:p>
@@ -3489,11 +3497,47 @@
             <a:r>
               <a:rPr sz="1600">
                 <a:solidFill>
-                  <a:srgbClr val="6A9955"/>
-                </a:solidFill>
-                <a:latin typeface="Consolas"/>
-              </a:rPr>
-              <a:t>// "is-a" framing:</a:t>
+                  <a:srgbClr val="C792EA"/>
+                </a:solidFill>
+                <a:latin typeface="Consolas"/>
+              </a:rPr>
+              <a:t>enum</a:t>
+            </a:r>
+            <a:r>
+              <a:rPr sz="1600">
+                <a:solidFill>
+                  <a:srgbClr val="EEFFFF"/>
+                </a:solidFill>
+                <a:latin typeface="Consolas"/>
+              </a:rPr>
+              <a:t> </a:t>
+            </a:r>
+            <a:r>
+              <a:rPr sz="1600">
+                <a:solidFill>
+                  <a:srgbClr val="FFCB6B"/>
+                </a:solidFill>
+                <a:latin typeface="Consolas"/>
+              </a:rPr>
+              <a:t>LedLevel</a:t>
+            </a:r>
+            <a:r>
+              <a:rPr sz="1600">
+                <a:solidFill>
+                  <a:srgbClr val="EEFFFF"/>
+                </a:solidFill>
+                <a:latin typeface="Consolas"/>
+              </a:rPr>
+              <a:t> </a:t>
+            </a:r>
+            <a:r>
+              <a:rPr sz="1600">
+                <a:solidFill>
+                  <a:srgbClr val="BAC2DE"/>
+                </a:solidFill>
+                <a:latin typeface="Consolas"/>
+              </a:rPr>
+              <a:t>{</a:t>
             </a:r>
           </a:p>
           <a:p>
@@ -3511,11 +3555,29 @@
             <a:r>
               <a:rPr sz="1600">
                 <a:solidFill>
-                  <a:srgbClr val="6A9955"/>
-                </a:solidFill>
-                <a:latin typeface="Consolas"/>
-              </a:rPr>
-              <a:t>// - LedLevel is-a Default trait</a:t>
+                  <a:srgbClr val="EEFFFF"/>
+                </a:solidFill>
+                <a:latin typeface="Consolas"/>
+              </a:rPr>
+              <a:t>    </a:t>
+            </a:r>
+            <a:r>
+              <a:rPr sz="1600">
+                <a:solidFill>
+                  <a:srgbClr val="EEFFFF"/>
+                </a:solidFill>
+                <a:latin typeface="Consolas"/>
+              </a:rPr>
+              <a:t>On</a:t>
+            </a:r>
+            <a:r>
+              <a:rPr sz="1600">
+                <a:solidFill>
+                  <a:srgbClr val="BAC2DE"/>
+                </a:solidFill>
+                <a:latin typeface="Consolas"/>
+              </a:rPr>
+              <a:t>,</a:t>
             </a:r>
           </a:p>
           <a:p>
@@ -3533,11 +3595,38 @@
             <a:r>
               <a:rPr sz="1600">
                 <a:solidFill>
+                  <a:srgbClr val="EEFFFF"/>
+                </a:solidFill>
+                <a:latin typeface="Consolas"/>
+              </a:rPr>
+              <a:t>    </a:t>
+            </a:r>
+            <a:r>
+              <a:rPr sz="1600">
+                <a:solidFill>
                   <a:srgbClr val="6A9955"/>
                 </a:solidFill>
                 <a:latin typeface="Consolas"/>
               </a:rPr>
-              <a:t>// - LedLevel is-a Debug trait</a:t>
+              <a:t>#[</a:t>
+            </a:r>
+            <a:r>
+              <a:rPr sz="1600">
+                <a:solidFill>
+                  <a:srgbClr val="6A9955"/>
+                </a:solidFill>
+                <a:latin typeface="Consolas"/>
+              </a:rPr>
+              <a:t>default</a:t>
+            </a:r>
+            <a:r>
+              <a:rPr sz="1600">
+                <a:solidFill>
+                  <a:srgbClr val="6A9955"/>
+                </a:solidFill>
+                <a:latin typeface="Consolas"/>
+              </a:rPr>
+              <a:t>]</a:t>
             </a:r>
           </a:p>
           <a:p>
@@ -3555,11 +3644,29 @@
             <a:r>
               <a:rPr sz="1600">
                 <a:solidFill>
-                  <a:srgbClr val="6A9955"/>
-                </a:solidFill>
-                <a:latin typeface="Consolas"/>
-              </a:rPr>
-              <a:t>// - LedLevel is-a Clone/Copy traits</a:t>
+                  <a:srgbClr val="EEFFFF"/>
+                </a:solidFill>
+                <a:latin typeface="Consolas"/>
+              </a:rPr>
+              <a:t>    </a:t>
+            </a:r>
+            <a:r>
+              <a:rPr sz="1600">
+                <a:solidFill>
+                  <a:srgbClr val="EEFFFF"/>
+                </a:solidFill>
+                <a:latin typeface="Consolas"/>
+              </a:rPr>
+              <a:t>Off</a:t>
+            </a:r>
+            <a:r>
+              <a:rPr sz="1600">
+                <a:solidFill>
+                  <a:srgbClr val="BAC2DE"/>
+                </a:solidFill>
+                <a:latin typeface="Consolas"/>
+              </a:rPr>
+              <a:t>,</a:t>
             </a:r>
           </a:p>
           <a:p>
@@ -3577,11 +3684,11 @@
             <a:r>
               <a:rPr sz="1600">
                 <a:solidFill>
-                  <a:srgbClr val="6A9955"/>
-                </a:solidFill>
-                <a:latin typeface="Consolas"/>
-              </a:rPr>
-              <a:t>// - LedLevel is-a Eq/Ord/Hash traits</a:t>
+                  <a:srgbClr val="BAC2DE"/>
+                </a:solidFill>
+                <a:latin typeface="Consolas"/>
+              </a:rPr>
+              <a:t>}</a:t>
             </a:r>
           </a:p>
           <a:p>
@@ -3596,15 +3703,6 @@
                 <a:spcPts val="0"/>
               </a:spcAft>
             </a:pPr>
-            <a:r>
-              <a:rPr sz="1600">
-                <a:solidFill>
-                  <a:srgbClr val="6A9955"/>
-                </a:solidFill>
-                <a:latin typeface="Consolas"/>
-              </a:rPr>
-              <a:t>//</a:t>
-            </a:r>
           </a:p>
           <a:p>
             <a:pPr>
@@ -3621,11 +3719,65 @@
             <a:r>
               <a:rPr sz="1600">
                 <a:solidFill>
-                  <a:srgbClr val="6A9955"/>
-                </a:solidFill>
-                <a:latin typeface="Consolas"/>
-              </a:rPr>
-              <a:t>// How to think about it:</a:t>
+                  <a:srgbClr val="C792EA"/>
+                </a:solidFill>
+                <a:latin typeface="Consolas"/>
+              </a:rPr>
+              <a:t>fn</a:t>
+            </a:r>
+            <a:r>
+              <a:rPr sz="1600">
+                <a:solidFill>
+                  <a:srgbClr val="EEFFFF"/>
+                </a:solidFill>
+                <a:latin typeface="Consolas"/>
+              </a:rPr>
+              <a:t> </a:t>
+            </a:r>
+            <a:r>
+              <a:rPr sz="1600">
+                <a:solidFill>
+                  <a:srgbClr val="82AAFF"/>
+                </a:solidFill>
+                <a:latin typeface="Consolas"/>
+              </a:rPr>
+              <a:t>main</a:t>
+            </a:r>
+            <a:r>
+              <a:rPr sz="1600">
+                <a:solidFill>
+                  <a:srgbClr val="BAC2DE"/>
+                </a:solidFill>
+                <a:latin typeface="Consolas"/>
+              </a:rPr>
+              <a:t>(</a:t>
+            </a:r>
+            <a:r>
+              <a:rPr sz="1600">
+                <a:solidFill>
+                  <a:srgbClr val="BAC2DE"/>
+                </a:solidFill>
+                <a:latin typeface="Consolas"/>
+              </a:rPr>
+              <a:t>)</a:t>
+            </a:r>
+            <a:r>
+              <a:rPr sz="1600">
+                <a:solidFill>
+                  <a:srgbClr val="EEFFFF"/>
+                </a:solidFill>
+                <a:latin typeface="Consolas"/>
+              </a:rPr>
+              <a:t> </a:t>
+            </a:r>
+            <a:r>
+              <a:rPr sz="1600">
+                <a:solidFill>
+                  <a:srgbClr val="BAC2DE"/>
+                </a:solidFill>
+                <a:latin typeface="Consolas"/>
+              </a:rPr>
+              <a:t>{</a:t>
             </a:r>
           </a:p>
           <a:p>
@@ -3643,11 +3795,119 @@
             <a:r>
               <a:rPr sz="1600">
                 <a:solidFill>
-                  <a:srgbClr val="6A9955"/>
-                </a:solidFill>
-                <a:latin typeface="Consolas"/>
-              </a:rPr>
-              <a:t>// - 1a (default methods): reuse comes from code inside a trait definition.</a:t>
+                  <a:srgbClr val="EEFFFF"/>
+                </a:solidFill>
+                <a:latin typeface="Consolas"/>
+              </a:rPr>
+              <a:t>    </a:t>
+            </a:r>
+            <a:r>
+              <a:rPr sz="1600">
+                <a:solidFill>
+                  <a:srgbClr val="C792EA"/>
+                </a:solidFill>
+                <a:latin typeface="Consolas"/>
+              </a:rPr>
+              <a:t>let</a:t>
+            </a:r>
+            <a:r>
+              <a:rPr sz="1600">
+                <a:solidFill>
+                  <a:srgbClr val="EEFFFF"/>
+                </a:solidFill>
+                <a:latin typeface="Consolas"/>
+              </a:rPr>
+              <a:t> </a:t>
+            </a:r>
+            <a:r>
+              <a:rPr sz="1600">
+                <a:solidFill>
+                  <a:srgbClr val="EEFFFF"/>
+                </a:solidFill>
+                <a:latin typeface="Consolas"/>
+              </a:rPr>
+              <a:t>default_level</a:t>
+            </a:r>
+            <a:r>
+              <a:rPr sz="1600">
+                <a:solidFill>
+                  <a:srgbClr val="EEFFFF"/>
+                </a:solidFill>
+                <a:latin typeface="Consolas"/>
+              </a:rPr>
+              <a:t> </a:t>
+            </a:r>
+            <a:r>
+              <a:rPr sz="1600">
+                <a:solidFill>
+                  <a:srgbClr val="89DDFF"/>
+                </a:solidFill>
+                <a:latin typeface="Consolas"/>
+              </a:rPr>
+              <a:t>=</a:t>
+            </a:r>
+            <a:r>
+              <a:rPr sz="1600">
+                <a:solidFill>
+                  <a:srgbClr val="EEFFFF"/>
+                </a:solidFill>
+                <a:latin typeface="Consolas"/>
+              </a:rPr>
+              <a:t> </a:t>
+            </a:r>
+            <a:r>
+              <a:rPr sz="1600">
+                <a:solidFill>
+                  <a:srgbClr val="EEFFFF"/>
+                </a:solidFill>
+                <a:latin typeface="Consolas"/>
+              </a:rPr>
+              <a:t>LedLevel</a:t>
+            </a:r>
+            <a:r>
+              <a:rPr sz="1600">
+                <a:solidFill>
+                  <a:srgbClr val="EEFFFF"/>
+                </a:solidFill>
+                <a:latin typeface="Consolas"/>
+              </a:rPr>
+              <a:t>::</a:t>
+            </a:r>
+            <a:r>
+              <a:rPr sz="1600">
+                <a:solidFill>
+                  <a:srgbClr val="EEFFFF"/>
+                </a:solidFill>
+                <a:latin typeface="Consolas"/>
+              </a:rPr>
+              <a:t>default</a:t>
+            </a:r>
+            <a:r>
+              <a:rPr sz="1600">
+                <a:solidFill>
+                  <a:srgbClr val="BAC2DE"/>
+                </a:solidFill>
+                <a:latin typeface="Consolas"/>
+              </a:rPr>
+              <a:t>(</a:t>
+            </a:r>
+            <a:r>
+              <a:rPr sz="1600">
+                <a:solidFill>
+                  <a:srgbClr val="BAC2DE"/>
+                </a:solidFill>
+                <a:latin typeface="Consolas"/>
+              </a:rPr>
+              <a:t>)</a:t>
+            </a:r>
+            <a:r>
+              <a:rPr sz="1600">
+                <a:solidFill>
+                  <a:srgbClr val="BAC2DE"/>
+                </a:solidFill>
+                <a:latin typeface="Consolas"/>
+              </a:rPr>
+              <a:t>;</a:t>
             </a:r>
           </a:p>
           <a:p>
@@ -3665,11 +3925,101 @@
             <a:r>
               <a:rPr sz="1600">
                 <a:solidFill>
-                  <a:srgbClr val="6A9955"/>
-                </a:solidFill>
-                <a:latin typeface="Consolas"/>
-              </a:rPr>
-              <a:t>// - 1d (derive): reuse comes from macro-generated impl blocks.</a:t>
+                  <a:srgbClr val="EEFFFF"/>
+                </a:solidFill>
+                <a:latin typeface="Consolas"/>
+              </a:rPr>
+              <a:t>    </a:t>
+            </a:r>
+            <a:r>
+              <a:rPr sz="1600">
+                <a:solidFill>
+                  <a:srgbClr val="C792EA"/>
+                </a:solidFill>
+                <a:latin typeface="Consolas"/>
+              </a:rPr>
+              <a:t>let</a:t>
+            </a:r>
+            <a:r>
+              <a:rPr sz="1600">
+                <a:solidFill>
+                  <a:srgbClr val="EEFFFF"/>
+                </a:solidFill>
+                <a:latin typeface="Consolas"/>
+              </a:rPr>
+              <a:t> </a:t>
+            </a:r>
+            <a:r>
+              <a:rPr sz="1600">
+                <a:solidFill>
+                  <a:srgbClr val="EEFFFF"/>
+                </a:solidFill>
+                <a:latin typeface="Consolas"/>
+              </a:rPr>
+              <a:t>on</a:t>
+            </a:r>
+            <a:r>
+              <a:rPr sz="1600">
+                <a:solidFill>
+                  <a:srgbClr val="EEFFFF"/>
+                </a:solidFill>
+                <a:latin typeface="Consolas"/>
+              </a:rPr>
+              <a:t> </a:t>
+            </a:r>
+            <a:r>
+              <a:rPr sz="1600">
+                <a:solidFill>
+                  <a:srgbClr val="89DDFF"/>
+                </a:solidFill>
+                <a:latin typeface="Consolas"/>
+              </a:rPr>
+              <a:t>=</a:t>
+            </a:r>
+            <a:r>
+              <a:rPr sz="1600">
+                <a:solidFill>
+                  <a:srgbClr val="EEFFFF"/>
+                </a:solidFill>
+                <a:latin typeface="Consolas"/>
+              </a:rPr>
+              <a:t> </a:t>
+            </a:r>
+            <a:r>
+              <a:rPr sz="1600">
+                <a:solidFill>
+                  <a:srgbClr val="EEFFFF"/>
+                </a:solidFill>
+                <a:latin typeface="Consolas"/>
+              </a:rPr>
+              <a:t>LedLevel</a:t>
+            </a:r>
+            <a:r>
+              <a:rPr sz="1600">
+                <a:solidFill>
+                  <a:srgbClr val="EEFFFF"/>
+                </a:solidFill>
+                <a:latin typeface="Consolas"/>
+              </a:rPr>
+              <a:t>::</a:t>
+            </a:r>
+            <a:r>
+              <a:rPr sz="1600">
+                <a:solidFill>
+                  <a:srgbClr val="EEFFFF"/>
+                </a:solidFill>
+                <a:latin typeface="Consolas"/>
+              </a:rPr>
+              <a:t>On</a:t>
+            </a:r>
+            <a:r>
+              <a:rPr sz="1600">
+                <a:solidFill>
+                  <a:srgbClr val="BAC2DE"/>
+                </a:solidFill>
+                <a:latin typeface="Consolas"/>
+              </a:rPr>
+              <a:t>;</a:t>
             </a:r>
           </a:p>
           <a:p>
@@ -3687,11 +4037,101 @@
             <a:r>
               <a:rPr sz="1600">
                 <a:solidFill>
-                  <a:srgbClr val="6A9955"/>
-                </a:solidFill>
-                <a:latin typeface="Consolas"/>
-              </a:rPr>
-              <a:t>//</a:t>
+                  <a:srgbClr val="EEFFFF"/>
+                </a:solidFill>
+                <a:latin typeface="Consolas"/>
+              </a:rPr>
+              <a:t>    </a:t>
+            </a:r>
+            <a:r>
+              <a:rPr sz="1600">
+                <a:solidFill>
+                  <a:srgbClr val="C792EA"/>
+                </a:solidFill>
+                <a:latin typeface="Consolas"/>
+              </a:rPr>
+              <a:t>let</a:t>
+            </a:r>
+            <a:r>
+              <a:rPr sz="1600">
+                <a:solidFill>
+                  <a:srgbClr val="EEFFFF"/>
+                </a:solidFill>
+                <a:latin typeface="Consolas"/>
+              </a:rPr>
+              <a:t> </a:t>
+            </a:r>
+            <a:r>
+              <a:rPr sz="1600">
+                <a:solidFill>
+                  <a:srgbClr val="EEFFFF"/>
+                </a:solidFill>
+                <a:latin typeface="Consolas"/>
+              </a:rPr>
+              <a:t>off</a:t>
+            </a:r>
+            <a:r>
+              <a:rPr sz="1600">
+                <a:solidFill>
+                  <a:srgbClr val="EEFFFF"/>
+                </a:solidFill>
+                <a:latin typeface="Consolas"/>
+              </a:rPr>
+              <a:t> </a:t>
+            </a:r>
+            <a:r>
+              <a:rPr sz="1600">
+                <a:solidFill>
+                  <a:srgbClr val="89DDFF"/>
+                </a:solidFill>
+                <a:latin typeface="Consolas"/>
+              </a:rPr>
+              <a:t>=</a:t>
+            </a:r>
+            <a:r>
+              <a:rPr sz="1600">
+                <a:solidFill>
+                  <a:srgbClr val="EEFFFF"/>
+                </a:solidFill>
+                <a:latin typeface="Consolas"/>
+              </a:rPr>
+              <a:t> </a:t>
+            </a:r>
+            <a:r>
+              <a:rPr sz="1600">
+                <a:solidFill>
+                  <a:srgbClr val="EEFFFF"/>
+                </a:solidFill>
+                <a:latin typeface="Consolas"/>
+              </a:rPr>
+              <a:t>LedLevel</a:t>
+            </a:r>
+            <a:r>
+              <a:rPr sz="1600">
+                <a:solidFill>
+                  <a:srgbClr val="EEFFFF"/>
+                </a:solidFill>
+                <a:latin typeface="Consolas"/>
+              </a:rPr>
+              <a:t>::</a:t>
+            </a:r>
+            <a:r>
+              <a:rPr sz="1600">
+                <a:solidFill>
+                  <a:srgbClr val="EEFFFF"/>
+                </a:solidFill>
+                <a:latin typeface="Consolas"/>
+              </a:rPr>
+              <a:t>Off</a:t>
+            </a:r>
+            <a:r>
+              <a:rPr sz="1600">
+                <a:solidFill>
+                  <a:srgbClr val="BAC2DE"/>
+                </a:solidFill>
+                <a:latin typeface="Consolas"/>
+              </a:rPr>
+              <a:t>;</a:t>
             </a:r>
           </a:p>
           <a:p>
@@ -3706,15 +4146,6 @@
                 <a:spcPts val="0"/>
               </a:spcAft>
             </a:pPr>
-            <a:r>
-              <a:rPr sz="1600">
-                <a:solidFill>
-                  <a:srgbClr val="6A9955"/>
-                </a:solidFill>
-                <a:latin typeface="Consolas"/>
-              </a:rPr>
-              <a:t>// So this is behavior reuse through traits, but generated instead of handwritten.</a:t>
-            </a:r>
           </a:p>
           <a:p>
             <a:pPr>
@@ -3731,29 +4162,101 @@
             <a:r>
               <a:rPr sz="1600">
                 <a:solidFill>
-                  <a:srgbClr val="6A9955"/>
-                </a:solidFill>
-                <a:latin typeface="Consolas"/>
-              </a:rPr>
-              <a:t>#[</a:t>
-            </a:r>
-            <a:r>
-              <a:rPr sz="1600">
-                <a:solidFill>
-                  <a:srgbClr val="6A9955"/>
-                </a:solidFill>
-                <a:latin typeface="Consolas"/>
-              </a:rPr>
-              <a:t>derive(Clone, Copy, Debug, Eq, Hash, Ord, PartialEq, PartialOrd, Default)</a:t>
-            </a:r>
-            <a:r>
-              <a:rPr sz="1600">
-                <a:solidFill>
-                  <a:srgbClr val="6A9955"/>
-                </a:solidFill>
-                <a:latin typeface="Consolas"/>
-              </a:rPr>
-              <a:t>]</a:t>
+                  <a:srgbClr val="EEFFFF"/>
+                </a:solidFill>
+                <a:latin typeface="Consolas"/>
+              </a:rPr>
+              <a:t>    </a:t>
+            </a:r>
+            <a:r>
+              <a:rPr sz="1600">
+                <a:solidFill>
+                  <a:srgbClr val="82AAFF"/>
+                </a:solidFill>
+                <a:latin typeface="Consolas"/>
+              </a:rPr>
+              <a:t>assert_eq!</a:t>
+            </a:r>
+            <a:r>
+              <a:rPr sz="1600">
+                <a:solidFill>
+                  <a:srgbClr val="BAC2DE"/>
+                </a:solidFill>
+                <a:latin typeface="Consolas"/>
+              </a:rPr>
+              <a:t>(</a:t>
+            </a:r>
+            <a:r>
+              <a:rPr sz="1600">
+                <a:solidFill>
+                  <a:srgbClr val="EEFFFF"/>
+                </a:solidFill>
+                <a:latin typeface="Consolas"/>
+              </a:rPr>
+              <a:t>default_level</a:t>
+            </a:r>
+            <a:r>
+              <a:rPr sz="1600">
+                <a:solidFill>
+                  <a:srgbClr val="BAC2DE"/>
+                </a:solidFill>
+                <a:latin typeface="Consolas"/>
+              </a:rPr>
+              <a:t>,</a:t>
+            </a:r>
+            <a:r>
+              <a:rPr sz="1600">
+                <a:solidFill>
+                  <a:srgbClr val="EEFFFF"/>
+                </a:solidFill>
+                <a:latin typeface="Consolas"/>
+              </a:rPr>
+              <a:t> </a:t>
+            </a:r>
+            <a:r>
+              <a:rPr sz="1600">
+                <a:solidFill>
+                  <a:srgbClr val="EEFFFF"/>
+                </a:solidFill>
+                <a:latin typeface="Consolas"/>
+              </a:rPr>
+              <a:t>LedLevel</a:t>
+            </a:r>
+            <a:r>
+              <a:rPr sz="1600">
+                <a:solidFill>
+                  <a:srgbClr val="EEFFFF"/>
+                </a:solidFill>
+                <a:latin typeface="Consolas"/>
+              </a:rPr>
+              <a:t>::</a:t>
+            </a:r>
+            <a:r>
+              <a:rPr sz="1600">
+                <a:solidFill>
+                  <a:srgbClr val="EEFFFF"/>
+                </a:solidFill>
+                <a:latin typeface="Consolas"/>
+              </a:rPr>
+              <a:t>Off</a:t>
+            </a:r>
+            <a:r>
+              <a:rPr sz="1600">
+                <a:solidFill>
+                  <a:srgbClr val="BAC2DE"/>
+                </a:solidFill>
+                <a:latin typeface="Consolas"/>
+              </a:rPr>
+              <a:t>)</a:t>
+            </a:r>
+            <a:r>
+              <a:rPr sz="1600">
+                <a:solidFill>
+                  <a:srgbClr val="BAC2DE"/>
+                </a:solidFill>
+                <a:latin typeface="Consolas"/>
+              </a:rPr>
+              <a:t>;</a:t>
             </a:r>
           </a:p>
           <a:p>
@@ -3771,16 +4274,52 @@
             <a:r>
               <a:rPr sz="1600">
                 <a:solidFill>
-                  <a:srgbClr val="C586C0"/>
-                </a:solidFill>
-                <a:latin typeface="Consolas"/>
-              </a:rPr>
-              <a:t>enum</a:t>
-            </a:r>
-            <a:r>
-              <a:rPr sz="1600">
-                <a:solidFill>
-                  <a:srgbClr val="DCDCDC"/>
+                  <a:srgbClr val="EEFFFF"/>
+                </a:solidFill>
+                <a:latin typeface="Consolas"/>
+              </a:rPr>
+              <a:t>    </a:t>
+            </a:r>
+            <a:r>
+              <a:rPr sz="1600">
+                <a:solidFill>
+                  <a:srgbClr val="82AAFF"/>
+                </a:solidFill>
+                <a:latin typeface="Consolas"/>
+              </a:rPr>
+              <a:t>assert_ne!</a:t>
+            </a:r>
+            <a:r>
+              <a:rPr sz="1600">
+                <a:solidFill>
+                  <a:srgbClr val="BAC2DE"/>
+                </a:solidFill>
+                <a:latin typeface="Consolas"/>
+              </a:rPr>
+              <a:t>(</a:t>
+            </a:r>
+            <a:r>
+              <a:rPr sz="1600">
+                <a:solidFill>
+                  <a:srgbClr val="EEFFFF"/>
+                </a:solidFill>
+                <a:latin typeface="Consolas"/>
+              </a:rPr>
+              <a:t>on</a:t>
+            </a:r>
+            <a:r>
+              <a:rPr sz="1600">
+                <a:solidFill>
+                  <a:srgbClr val="BAC2DE"/>
+                </a:solidFill>
+                <a:latin typeface="Consolas"/>
+              </a:rPr>
+              <a:t>,</a:t>
+            </a:r>
+            <a:r>
+              <a:rPr sz="1600">
+                <a:solidFill>
+                  <a:srgbClr val="EEFFFF"/>
                 </a:solidFill>
                 <a:latin typeface="Consolas"/>
               </a:rPr>
@@ -3789,29 +4328,29 @@
             <a:r>
               <a:rPr sz="1600">
                 <a:solidFill>
-                  <a:srgbClr val="4EC9B0"/>
-                </a:solidFill>
-                <a:latin typeface="Consolas"/>
-              </a:rPr>
-              <a:t>LedLevel</a:t>
-            </a:r>
-            <a:r>
-              <a:rPr sz="1600">
-                <a:solidFill>
-                  <a:srgbClr val="DCDCDC"/>
-                </a:solidFill>
-                <a:latin typeface="Consolas"/>
-              </a:rPr>
-              <a:t> </a:t>
-            </a:r>
-            <a:r>
-              <a:rPr sz="1600">
-                <a:solidFill>
-                  <a:srgbClr val="DCDCDC"/>
-                </a:solidFill>
-                <a:latin typeface="Consolas"/>
-              </a:rPr>
-              <a:t>{</a:t>
+                  <a:srgbClr val="EEFFFF"/>
+                </a:solidFill>
+                <a:latin typeface="Consolas"/>
+              </a:rPr>
+              <a:t>off</a:t>
+            </a:r>
+            <a:r>
+              <a:rPr sz="1600">
+                <a:solidFill>
+                  <a:srgbClr val="BAC2DE"/>
+                </a:solidFill>
+                <a:latin typeface="Consolas"/>
+              </a:rPr>
+              <a:t>)</a:t>
+            </a:r>
+            <a:r>
+              <a:rPr sz="1600">
+                <a:solidFill>
+                  <a:srgbClr val="BAC2DE"/>
+                </a:solidFill>
+                <a:latin typeface="Consolas"/>
+              </a:rPr>
+              <a:t>;</a:t>
             </a:r>
           </a:p>
           <a:p>
@@ -3829,7 +4368,7 @@
             <a:r>
               <a:rPr sz="1600">
                 <a:solidFill>
-                  <a:srgbClr val="DCDCDC"/>
+                  <a:srgbClr val="EEFFFF"/>
                 </a:solidFill>
                 <a:latin typeface="Consolas"/>
               </a:rPr>
@@ -3838,20 +4377,83 @@
             <a:r>
               <a:rPr sz="1600">
                 <a:solidFill>
-                  <a:srgbClr val="DCDCDC"/>
-                </a:solidFill>
-                <a:latin typeface="Consolas"/>
-              </a:rPr>
-              <a:t>On</a:t>
-            </a:r>
-            <a:r>
-              <a:rPr sz="1600">
-                <a:solidFill>
-                  <a:srgbClr val="DCDCDC"/>
-                </a:solidFill>
-                <a:latin typeface="Consolas"/>
-              </a:rPr>
-              <a:t>,</a:t>
+                  <a:srgbClr val="82AAFF"/>
+                </a:solidFill>
+                <a:latin typeface="Consolas"/>
+              </a:rPr>
+              <a:t>assert!</a:t>
+            </a:r>
+            <a:r>
+              <a:rPr sz="1600">
+                <a:solidFill>
+                  <a:srgbClr val="BAC2DE"/>
+                </a:solidFill>
+                <a:latin typeface="Consolas"/>
+              </a:rPr>
+              <a:t>(</a:t>
+            </a:r>
+            <a:r>
+              <a:rPr sz="1600">
+                <a:solidFill>
+                  <a:srgbClr val="EEFFFF"/>
+                </a:solidFill>
+                <a:latin typeface="Consolas"/>
+              </a:rPr>
+              <a:t>off</a:t>
+            </a:r>
+            <a:r>
+              <a:rPr sz="1600">
+                <a:solidFill>
+                  <a:srgbClr val="EEFFFF"/>
+                </a:solidFill>
+                <a:latin typeface="Consolas"/>
+              </a:rPr>
+              <a:t> </a:t>
+            </a:r>
+            <a:r>
+              <a:rPr sz="1600">
+                <a:solidFill>
+                  <a:srgbClr val="89DDFF"/>
+                </a:solidFill>
+                <a:latin typeface="Consolas"/>
+              </a:rPr>
+              <a:t>&gt;</a:t>
+            </a:r>
+            <a:r>
+              <a:rPr sz="1600">
+                <a:solidFill>
+                  <a:srgbClr val="EEFFFF"/>
+                </a:solidFill>
+                <a:latin typeface="Consolas"/>
+              </a:rPr>
+              <a:t> </a:t>
+            </a:r>
+            <a:r>
+              <a:rPr sz="1600">
+                <a:solidFill>
+                  <a:srgbClr val="EEFFFF"/>
+                </a:solidFill>
+                <a:latin typeface="Consolas"/>
+              </a:rPr>
+              <a:t>on</a:t>
+            </a:r>
+            <a:r>
+              <a:rPr sz="1600">
+                <a:solidFill>
+                  <a:srgbClr val="BAC2DE"/>
+                </a:solidFill>
+                <a:latin typeface="Consolas"/>
+              </a:rPr>
+              <a:t>)</a:t>
+            </a:r>
+            <a:r>
+              <a:rPr sz="1600">
+                <a:solidFill>
+                  <a:srgbClr val="BAC2DE"/>
+                </a:solidFill>
+                <a:latin typeface="Consolas"/>
+              </a:rPr>
+              <a:t>;</a:t>
             </a:r>
           </a:p>
           <a:p>
@@ -3866,42 +4468,6 @@
                 <a:spcPts val="0"/>
               </a:spcAft>
             </a:pPr>
-            <a:r>
-              <a:rPr sz="1600">
-                <a:solidFill>
-                  <a:srgbClr val="DCDCDC"/>
-                </a:solidFill>
-                <a:latin typeface="Consolas"/>
-              </a:rPr>
-              <a:t>    </a:t>
-            </a:r>
-            <a:r>
-              <a:rPr sz="1600">
-                <a:solidFill>
-                  <a:srgbClr val="6A9955"/>
-                </a:solidFill>
-                <a:latin typeface="Consolas"/>
-              </a:rPr>
-              <a:t>#[</a:t>
-            </a:r>
-            <a:r>
-              <a:rPr sz="1600">
-                <a:solidFill>
-                  <a:srgbClr val="6A9955"/>
-                </a:solidFill>
-                <a:latin typeface="Consolas"/>
-              </a:rPr>
-              <a:t>default</a:t>
-            </a:r>
-            <a:r>
-              <a:rPr sz="1600">
-                <a:solidFill>
-                  <a:srgbClr val="6A9955"/>
-                </a:solidFill>
-                <a:latin typeface="Consolas"/>
-              </a:rPr>
-              <a:t>]</a:t>
-            </a:r>
           </a:p>
           <a:p>
             <a:pPr>
@@ -3918,7 +4484,7 @@
             <a:r>
               <a:rPr sz="1600">
                 <a:solidFill>
-                  <a:srgbClr val="DCDCDC"/>
+                  <a:srgbClr val="EEFFFF"/>
                 </a:solidFill>
                 <a:latin typeface="Consolas"/>
               </a:rPr>
@@ -3927,20 +4493,11 @@
             <a:r>
               <a:rPr sz="1600">
                 <a:solidFill>
-                  <a:srgbClr val="DCDCDC"/>
-                </a:solidFill>
-                <a:latin typeface="Consolas"/>
-              </a:rPr>
-              <a:t>Off</a:t>
-            </a:r>
-            <a:r>
-              <a:rPr sz="1600">
-                <a:solidFill>
-                  <a:srgbClr val="DCDCDC"/>
-                </a:solidFill>
-                <a:latin typeface="Consolas"/>
-              </a:rPr>
-              <a:t>,</a:t>
+                  <a:srgbClr val="6A9955"/>
+                </a:solidFill>
+                <a:latin typeface="Consolas"/>
+              </a:rPr>
+              <a:t>// `Copy` + `Clone` come from derive too.</a:t>
             </a:r>
           </a:p>
           <a:p>
@@ -3958,11 +4515,83 @@
             <a:r>
               <a:rPr sz="1600">
                 <a:solidFill>
-                  <a:srgbClr val="DCDCDC"/>
-                </a:solidFill>
-                <a:latin typeface="Consolas"/>
-              </a:rPr>
-              <a:t>}</a:t>
+                  <a:srgbClr val="EEFFFF"/>
+                </a:solidFill>
+                <a:latin typeface="Consolas"/>
+              </a:rPr>
+              <a:t>    </a:t>
+            </a:r>
+            <a:r>
+              <a:rPr sz="1600">
+                <a:solidFill>
+                  <a:srgbClr val="C792EA"/>
+                </a:solidFill>
+                <a:latin typeface="Consolas"/>
+              </a:rPr>
+              <a:t>let</a:t>
+            </a:r>
+            <a:r>
+              <a:rPr sz="1600">
+                <a:solidFill>
+                  <a:srgbClr val="EEFFFF"/>
+                </a:solidFill>
+                <a:latin typeface="Consolas"/>
+              </a:rPr>
+              <a:t> </a:t>
+            </a:r>
+            <a:r>
+              <a:rPr sz="1600">
+                <a:solidFill>
+                  <a:srgbClr val="EEFFFF"/>
+                </a:solidFill>
+                <a:latin typeface="Consolas"/>
+              </a:rPr>
+              <a:t>copied</a:t>
+            </a:r>
+            <a:r>
+              <a:rPr sz="1600">
+                <a:solidFill>
+                  <a:srgbClr val="EEFFFF"/>
+                </a:solidFill>
+                <a:latin typeface="Consolas"/>
+              </a:rPr>
+              <a:t> </a:t>
+            </a:r>
+            <a:r>
+              <a:rPr sz="1600">
+                <a:solidFill>
+                  <a:srgbClr val="89DDFF"/>
+                </a:solidFill>
+                <a:latin typeface="Consolas"/>
+              </a:rPr>
+              <a:t>=</a:t>
+            </a:r>
+            <a:r>
+              <a:rPr sz="1600">
+                <a:solidFill>
+                  <a:srgbClr val="EEFFFF"/>
+                </a:solidFill>
+                <a:latin typeface="Consolas"/>
+              </a:rPr>
+              <a:t> </a:t>
+            </a:r>
+            <a:r>
+              <a:rPr sz="1600">
+                <a:solidFill>
+                  <a:srgbClr val="EEFFFF"/>
+                </a:solidFill>
+                <a:latin typeface="Consolas"/>
+              </a:rPr>
+              <a:t>on</a:t>
+            </a:r>
+            <a:r>
+              <a:rPr sz="1600">
+                <a:solidFill>
+                  <a:srgbClr val="BAC2DE"/>
+                </a:solidFill>
+                <a:latin typeface="Consolas"/>
+              </a:rPr>
+              <a:t>;</a:t>
             </a:r>
           </a:p>
           <a:p>
@@ -3977,6 +4606,123 @@
                 <a:spcPts val="0"/>
               </a:spcAft>
             </a:pPr>
+            <a:r>
+              <a:rPr sz="1600">
+                <a:solidFill>
+                  <a:srgbClr val="EEFFFF"/>
+                </a:solidFill>
+                <a:latin typeface="Consolas"/>
+              </a:rPr>
+              <a:t>    </a:t>
+            </a:r>
+            <a:r>
+              <a:rPr sz="1600">
+                <a:solidFill>
+                  <a:srgbClr val="C792EA"/>
+                </a:solidFill>
+                <a:latin typeface="Consolas"/>
+              </a:rPr>
+              <a:t>let</a:t>
+            </a:r>
+            <a:r>
+              <a:rPr sz="1600">
+                <a:solidFill>
+                  <a:srgbClr val="EEFFFF"/>
+                </a:solidFill>
+                <a:latin typeface="Consolas"/>
+              </a:rPr>
+              <a:t> </a:t>
+            </a:r>
+            <a:r>
+              <a:rPr sz="1600">
+                <a:solidFill>
+                  <a:srgbClr val="EEFFFF"/>
+                </a:solidFill>
+                <a:latin typeface="Consolas"/>
+              </a:rPr>
+              <a:t>cloned</a:t>
+            </a:r>
+            <a:r>
+              <a:rPr sz="1600">
+                <a:solidFill>
+                  <a:srgbClr val="EEFFFF"/>
+                </a:solidFill>
+                <a:latin typeface="Consolas"/>
+              </a:rPr>
+              <a:t> </a:t>
+            </a:r>
+            <a:r>
+              <a:rPr sz="1600">
+                <a:solidFill>
+                  <a:srgbClr val="89DDFF"/>
+                </a:solidFill>
+                <a:latin typeface="Consolas"/>
+              </a:rPr>
+              <a:t>=</a:t>
+            </a:r>
+            <a:r>
+              <a:rPr sz="1600">
+                <a:solidFill>
+                  <a:srgbClr val="EEFFFF"/>
+                </a:solidFill>
+                <a:latin typeface="Consolas"/>
+              </a:rPr>
+              <a:t> </a:t>
+            </a:r>
+            <a:r>
+              <a:rPr sz="1600">
+                <a:solidFill>
+                  <a:srgbClr val="EEFFFF"/>
+                </a:solidFill>
+                <a:latin typeface="Consolas"/>
+              </a:rPr>
+              <a:t>off</a:t>
+            </a:r>
+            <a:r>
+              <a:rPr sz="1600">
+                <a:solidFill>
+                  <a:srgbClr val="BAC2DE"/>
+                </a:solidFill>
+                <a:latin typeface="Consolas"/>
+              </a:rPr>
+              <a:t>.</a:t>
+            </a:r>
+            <a:r>
+              <a:rPr sz="1600">
+                <a:solidFill>
+                  <a:srgbClr val="EEFFFF"/>
+                </a:solidFill>
+                <a:latin typeface="Consolas"/>
+              </a:rPr>
+              <a:t>clone</a:t>
+            </a:r>
+            <a:r>
+              <a:rPr sz="1600">
+                <a:solidFill>
+                  <a:srgbClr val="BAC2DE"/>
+                </a:solidFill>
+                <a:latin typeface="Consolas"/>
+              </a:rPr>
+              <a:t>(</a:t>
+            </a:r>
+            <a:r>
+              <a:rPr sz="1600">
+                <a:solidFill>
+                  <a:srgbClr val="BAC2DE"/>
+                </a:solidFill>
+                <a:latin typeface="Consolas"/>
+              </a:rPr>
+              <a:t>)</a:t>
+            </a:r>
+            <a:r>
+              <a:rPr sz="1600">
+                <a:solidFill>
+                  <a:srgbClr val="BAC2DE"/>
+                </a:solidFill>
+                <a:latin typeface="Consolas"/>
+              </a:rPr>
+              <a:t>;</a:t>
+            </a:r>
           </a:p>
           <a:p>
             <a:pPr>
@@ -3993,16 +4739,52 @@
             <a:r>
               <a:rPr sz="1600">
                 <a:solidFill>
-                  <a:srgbClr val="C586C0"/>
-                </a:solidFill>
-                <a:latin typeface="Consolas"/>
-              </a:rPr>
-              <a:t>fn</a:t>
-            </a:r>
-            <a:r>
-              <a:rPr sz="1600">
-                <a:solidFill>
-                  <a:srgbClr val="DCDCDC"/>
+                  <a:srgbClr val="EEFFFF"/>
+                </a:solidFill>
+                <a:latin typeface="Consolas"/>
+              </a:rPr>
+              <a:t>    </a:t>
+            </a:r>
+            <a:r>
+              <a:rPr sz="1600">
+                <a:solidFill>
+                  <a:srgbClr val="82AAFF"/>
+                </a:solidFill>
+                <a:latin typeface="Consolas"/>
+              </a:rPr>
+              <a:t>assert_eq!</a:t>
+            </a:r>
+            <a:r>
+              <a:rPr sz="1600">
+                <a:solidFill>
+                  <a:srgbClr val="BAC2DE"/>
+                </a:solidFill>
+                <a:latin typeface="Consolas"/>
+              </a:rPr>
+              <a:t>(</a:t>
+            </a:r>
+            <a:r>
+              <a:rPr sz="1600">
+                <a:solidFill>
+                  <a:srgbClr val="EEFFFF"/>
+                </a:solidFill>
+                <a:latin typeface="Consolas"/>
+              </a:rPr>
+              <a:t>copied</a:t>
+            </a:r>
+            <a:r>
+              <a:rPr sz="1600">
+                <a:solidFill>
+                  <a:srgbClr val="BAC2DE"/>
+                </a:solidFill>
+                <a:latin typeface="Consolas"/>
+              </a:rPr>
+              <a:t>,</a:t>
+            </a:r>
+            <a:r>
+              <a:rPr sz="1600">
+                <a:solidFill>
+                  <a:srgbClr val="EEFFFF"/>
                 </a:solidFill>
                 <a:latin typeface="Consolas"/>
               </a:rPr>
@@ -4011,25 +4793,16 @@
             <a:r>
               <a:rPr sz="1600">
                 <a:solidFill>
-                  <a:srgbClr val="DCDCAA"/>
-                </a:solidFill>
-                <a:latin typeface="Consolas"/>
-              </a:rPr>
-              <a:t>main</a:t>
-            </a:r>
-            <a:r>
-              <a:rPr sz="1600">
-                <a:solidFill>
-                  <a:srgbClr val="DCDCDC"/>
-                </a:solidFill>
-                <a:latin typeface="Consolas"/>
-              </a:rPr>
-              <a:t>(</a:t>
-            </a:r>
-            <a:r>
-              <a:rPr sz="1600">
-                <a:solidFill>
-                  <a:srgbClr val="DCDCDC"/>
+                  <a:srgbClr val="EEFFFF"/>
+                </a:solidFill>
+                <a:latin typeface="Consolas"/>
+              </a:rPr>
+              <a:t>on</a:t>
+            </a:r>
+            <a:r>
+              <a:rPr sz="1600">
+                <a:solidFill>
+                  <a:srgbClr val="BAC2DE"/>
                 </a:solidFill>
                 <a:latin typeface="Consolas"/>
               </a:rPr>
@@ -4038,20 +4811,11 @@
             <a:r>
               <a:rPr sz="1600">
                 <a:solidFill>
-                  <a:srgbClr val="DCDCDC"/>
-                </a:solidFill>
-                <a:latin typeface="Consolas"/>
-              </a:rPr>
-              <a:t> </a:t>
-            </a:r>
-            <a:r>
-              <a:rPr sz="1600">
-                <a:solidFill>
-                  <a:srgbClr val="DCDCDC"/>
-                </a:solidFill>
-                <a:latin typeface="Consolas"/>
-              </a:rPr>
-              <a:t>{</a:t>
+                  <a:srgbClr val="BAC2DE"/>
+                </a:solidFill>
+                <a:latin typeface="Consolas"/>
+              </a:rPr>
+              <a:t>;</a:t>
             </a:r>
           </a:p>
           <a:p>
@@ -4069,7 +4833,7 @@
             <a:r>
               <a:rPr sz="1600">
                 <a:solidFill>
-                  <a:srgbClr val="DCDCDC"/>
+                  <a:srgbClr val="EEFFFF"/>
                 </a:solidFill>
                 <a:latin typeface="Consolas"/>
               </a:rPr>
@@ -4078,16 +4842,43 @@
             <a:r>
               <a:rPr sz="1600">
                 <a:solidFill>
-                  <a:srgbClr val="C586C0"/>
-                </a:solidFill>
-                <a:latin typeface="Consolas"/>
-              </a:rPr>
-              <a:t>let</a:t>
-            </a:r>
-            <a:r>
-              <a:rPr sz="1600">
-                <a:solidFill>
-                  <a:srgbClr val="DCDCDC"/>
+                  <a:srgbClr val="82AAFF"/>
+                </a:solidFill>
+                <a:latin typeface="Consolas"/>
+              </a:rPr>
+              <a:t>assert_eq!</a:t>
+            </a:r>
+            <a:r>
+              <a:rPr sz="1600">
+                <a:solidFill>
+                  <a:srgbClr val="BAC2DE"/>
+                </a:solidFill>
+                <a:latin typeface="Consolas"/>
+              </a:rPr>
+              <a:t>(</a:t>
+            </a:r>
+            <a:r>
+              <a:rPr sz="1600">
+                <a:solidFill>
+                  <a:srgbClr val="EEFFFF"/>
+                </a:solidFill>
+                <a:latin typeface="Consolas"/>
+              </a:rPr>
+              <a:t>cloned</a:t>
+            </a:r>
+            <a:r>
+              <a:rPr sz="1600">
+                <a:solidFill>
+                  <a:srgbClr val="BAC2DE"/>
+                </a:solidFill>
+                <a:latin typeface="Consolas"/>
+              </a:rPr>
+              <a:t>,</a:t>
+            </a:r>
+            <a:r>
+              <a:rPr sz="1600">
+                <a:solidFill>
+                  <a:srgbClr val="EEFFFF"/>
                 </a:solidFill>
                 <a:latin typeface="Consolas"/>
               </a:rPr>
@@ -4096,79 +4887,16 @@
             <a:r>
               <a:rPr sz="1600">
                 <a:solidFill>
-                  <a:srgbClr val="DCDCDC"/>
-                </a:solidFill>
-                <a:latin typeface="Consolas"/>
-              </a:rPr>
-              <a:t>default_level</a:t>
-            </a:r>
-            <a:r>
-              <a:rPr sz="1600">
-                <a:solidFill>
-                  <a:srgbClr val="DCDCDC"/>
-                </a:solidFill>
-                <a:latin typeface="Consolas"/>
-              </a:rPr>
-              <a:t> </a:t>
-            </a:r>
-            <a:r>
-              <a:rPr sz="1600">
-                <a:solidFill>
-                  <a:srgbClr val="DCDCDC"/>
-                </a:solidFill>
-                <a:latin typeface="Consolas"/>
-              </a:rPr>
-              <a:t>=</a:t>
-            </a:r>
-            <a:r>
-              <a:rPr sz="1600">
-                <a:solidFill>
-                  <a:srgbClr val="DCDCDC"/>
-                </a:solidFill>
-                <a:latin typeface="Consolas"/>
-              </a:rPr>
-              <a:t> </a:t>
-            </a:r>
-            <a:r>
-              <a:rPr sz="1600">
-                <a:solidFill>
-                  <a:srgbClr val="DCDCDC"/>
-                </a:solidFill>
-                <a:latin typeface="Consolas"/>
-              </a:rPr>
-              <a:t>LedLevel</a:t>
-            </a:r>
-            <a:r>
-              <a:rPr sz="1600">
-                <a:solidFill>
-                  <a:srgbClr val="DCDCDC"/>
-                </a:solidFill>
-                <a:latin typeface="Consolas"/>
-              </a:rPr>
-              <a:t>::</a:t>
-            </a:r>
-            <a:r>
-              <a:rPr sz="1600">
-                <a:solidFill>
-                  <a:srgbClr val="DCDCDC"/>
-                </a:solidFill>
-                <a:latin typeface="Consolas"/>
-              </a:rPr>
-              <a:t>default</a:t>
-            </a:r>
-            <a:r>
-              <a:rPr sz="1600">
-                <a:solidFill>
-                  <a:srgbClr val="DCDCDC"/>
-                </a:solidFill>
-                <a:latin typeface="Consolas"/>
-              </a:rPr>
-              <a:t>(</a:t>
-            </a:r>
-            <a:r>
-              <a:rPr sz="1600">
-                <a:solidFill>
-                  <a:srgbClr val="DCDCDC"/>
+                  <a:srgbClr val="EEFFFF"/>
+                </a:solidFill>
+                <a:latin typeface="Consolas"/>
+              </a:rPr>
+              <a:t>off</a:t>
+            </a:r>
+            <a:r>
+              <a:rPr sz="1600">
+                <a:solidFill>
+                  <a:srgbClr val="BAC2DE"/>
                 </a:solidFill>
                 <a:latin typeface="Consolas"/>
               </a:rPr>
@@ -4177,7 +4905,7 @@
             <a:r>
               <a:rPr sz="1600">
                 <a:solidFill>
-                  <a:srgbClr val="DCDCDC"/>
+                  <a:srgbClr val="BAC2DE"/>
                 </a:solidFill>
                 <a:latin typeface="Consolas"/>
               </a:rPr>
@@ -4199,1093 +4927,7 @@
             <a:r>
               <a:rPr sz="1600">
                 <a:solidFill>
-                  <a:srgbClr val="DCDCDC"/>
-                </a:solidFill>
-                <a:latin typeface="Consolas"/>
-              </a:rPr>
-              <a:t>    </a:t>
-            </a:r>
-            <a:r>
-              <a:rPr sz="1600">
-                <a:solidFill>
-                  <a:srgbClr val="C586C0"/>
-                </a:solidFill>
-                <a:latin typeface="Consolas"/>
-              </a:rPr>
-              <a:t>let</a:t>
-            </a:r>
-            <a:r>
-              <a:rPr sz="1600">
-                <a:solidFill>
-                  <a:srgbClr val="DCDCDC"/>
-                </a:solidFill>
-                <a:latin typeface="Consolas"/>
-              </a:rPr>
-              <a:t> </a:t>
-            </a:r>
-            <a:r>
-              <a:rPr sz="1600">
-                <a:solidFill>
-                  <a:srgbClr val="DCDCDC"/>
-                </a:solidFill>
-                <a:latin typeface="Consolas"/>
-              </a:rPr>
-              <a:t>on</a:t>
-            </a:r>
-            <a:r>
-              <a:rPr sz="1600">
-                <a:solidFill>
-                  <a:srgbClr val="DCDCDC"/>
-                </a:solidFill>
-                <a:latin typeface="Consolas"/>
-              </a:rPr>
-              <a:t> </a:t>
-            </a:r>
-            <a:r>
-              <a:rPr sz="1600">
-                <a:solidFill>
-                  <a:srgbClr val="DCDCDC"/>
-                </a:solidFill>
-                <a:latin typeface="Consolas"/>
-              </a:rPr>
-              <a:t>=</a:t>
-            </a:r>
-            <a:r>
-              <a:rPr sz="1600">
-                <a:solidFill>
-                  <a:srgbClr val="DCDCDC"/>
-                </a:solidFill>
-                <a:latin typeface="Consolas"/>
-              </a:rPr>
-              <a:t> </a:t>
-            </a:r>
-            <a:r>
-              <a:rPr sz="1600">
-                <a:solidFill>
-                  <a:srgbClr val="DCDCDC"/>
-                </a:solidFill>
-                <a:latin typeface="Consolas"/>
-              </a:rPr>
-              <a:t>LedLevel</a:t>
-            </a:r>
-            <a:r>
-              <a:rPr sz="1600">
-                <a:solidFill>
-                  <a:srgbClr val="DCDCDC"/>
-                </a:solidFill>
-                <a:latin typeface="Consolas"/>
-              </a:rPr>
-              <a:t>::</a:t>
-            </a:r>
-            <a:r>
-              <a:rPr sz="1600">
-                <a:solidFill>
-                  <a:srgbClr val="DCDCDC"/>
-                </a:solidFill>
-                <a:latin typeface="Consolas"/>
-              </a:rPr>
-              <a:t>On</a:t>
-            </a:r>
-            <a:r>
-              <a:rPr sz="1600">
-                <a:solidFill>
-                  <a:srgbClr val="DCDCDC"/>
-                </a:solidFill>
-                <a:latin typeface="Consolas"/>
-              </a:rPr>
-              <a:t>;</a:t>
-            </a:r>
-          </a:p>
-          <a:p>
-            <a:pPr>
-              <a:lnSpc>
-                <a:spcPct val="95000"/>
-              </a:lnSpc>
-              <a:spcBef>
-                <a:spcPts val="0"/>
-              </a:spcBef>
-              <a:spcAft>
-                <a:spcPts val="0"/>
-              </a:spcAft>
-            </a:pPr>
-            <a:r>
-              <a:rPr sz="1600">
-                <a:solidFill>
-                  <a:srgbClr val="DCDCDC"/>
-                </a:solidFill>
-                <a:latin typeface="Consolas"/>
-              </a:rPr>
-              <a:t>    </a:t>
-            </a:r>
-            <a:r>
-              <a:rPr sz="1600">
-                <a:solidFill>
-                  <a:srgbClr val="C586C0"/>
-                </a:solidFill>
-                <a:latin typeface="Consolas"/>
-              </a:rPr>
-              <a:t>let</a:t>
-            </a:r>
-            <a:r>
-              <a:rPr sz="1600">
-                <a:solidFill>
-                  <a:srgbClr val="DCDCDC"/>
-                </a:solidFill>
-                <a:latin typeface="Consolas"/>
-              </a:rPr>
-              <a:t> </a:t>
-            </a:r>
-            <a:r>
-              <a:rPr sz="1600">
-                <a:solidFill>
-                  <a:srgbClr val="DCDCDC"/>
-                </a:solidFill>
-                <a:latin typeface="Consolas"/>
-              </a:rPr>
-              <a:t>off</a:t>
-            </a:r>
-            <a:r>
-              <a:rPr sz="1600">
-                <a:solidFill>
-                  <a:srgbClr val="DCDCDC"/>
-                </a:solidFill>
-                <a:latin typeface="Consolas"/>
-              </a:rPr>
-              <a:t> </a:t>
-            </a:r>
-            <a:r>
-              <a:rPr sz="1600">
-                <a:solidFill>
-                  <a:srgbClr val="DCDCDC"/>
-                </a:solidFill>
-                <a:latin typeface="Consolas"/>
-              </a:rPr>
-              <a:t>=</a:t>
-            </a:r>
-            <a:r>
-              <a:rPr sz="1600">
-                <a:solidFill>
-                  <a:srgbClr val="DCDCDC"/>
-                </a:solidFill>
-                <a:latin typeface="Consolas"/>
-              </a:rPr>
-              <a:t> </a:t>
-            </a:r>
-            <a:r>
-              <a:rPr sz="1600">
-                <a:solidFill>
-                  <a:srgbClr val="DCDCDC"/>
-                </a:solidFill>
-                <a:latin typeface="Consolas"/>
-              </a:rPr>
-              <a:t>LedLevel</a:t>
-            </a:r>
-            <a:r>
-              <a:rPr sz="1600">
-                <a:solidFill>
-                  <a:srgbClr val="DCDCDC"/>
-                </a:solidFill>
-                <a:latin typeface="Consolas"/>
-              </a:rPr>
-              <a:t>::</a:t>
-            </a:r>
-            <a:r>
-              <a:rPr sz="1600">
-                <a:solidFill>
-                  <a:srgbClr val="DCDCDC"/>
-                </a:solidFill>
-                <a:latin typeface="Consolas"/>
-              </a:rPr>
-              <a:t>Off</a:t>
-            </a:r>
-            <a:r>
-              <a:rPr sz="1600">
-                <a:solidFill>
-                  <a:srgbClr val="DCDCDC"/>
-                </a:solidFill>
-                <a:latin typeface="Consolas"/>
-              </a:rPr>
-              <a:t>;</a:t>
-            </a:r>
-          </a:p>
-          <a:p>
-            <a:pPr>
-              <a:lnSpc>
-                <a:spcPct val="95000"/>
-              </a:lnSpc>
-              <a:spcBef>
-                <a:spcPts val="0"/>
-              </a:spcBef>
-              <a:spcAft>
-                <a:spcPts val="0"/>
-              </a:spcAft>
-            </a:pPr>
-          </a:p>
-        </p:txBody>
-      </p:sp>
-    </p:spTree>
-  </p:cSld>
-  <p:clrMapOvr>
-    <a:masterClrMapping/>
-  </p:clrMapOvr>
-</p:sld>
-</file>
-
-<file path=ppt/slides/slide3.xml><?xml version="1.0" encoding="utf-8"?>
-<p:sld xmlns:a="http://schemas.openxmlformats.org/drawingml/2006/main" xmlns:p="http://schemas.openxmlformats.org/presentationml/2006/main" xmlns:r="http://schemas.openxmlformats.org/officeDocument/2006/relationships">
-  <p:cSld>
-    <p:spTree>
-      <p:nvGrpSpPr>
-        <p:cNvPr id="1" name=""/>
-        <p:cNvGrpSpPr/>
-        <p:nvPr/>
-      </p:nvGrpSpPr>
-      <p:grpSpPr/>
-      <p:sp>
-        <p:nvSpPr>
-          <p:cNvPr id="2" name="Rectangle 1"/>
-          <p:cNvSpPr/>
-          <p:nvPr/>
-        </p:nvSpPr>
-        <p:spPr>
-          <a:xfrm>
-            <a:off x="0" y="0"/>
-            <a:ext cx="9144000" cy="6858000"/>
-          </a:xfrm>
-          <a:prstGeom prst="rect">
-            <a:avLst/>
-          </a:prstGeom>
-          <a:solidFill>
-            <a:srgbClr val="000000"/>
-          </a:solidFill>
-          <a:ln>
-            <a:noFill/>
-          </a:ln>
-        </p:spPr>
-        <p:style>
-          <a:lnRef idx="1">
-            <a:schemeClr val="accent1"/>
-          </a:lnRef>
-          <a:fillRef idx="3">
-            <a:schemeClr val="accent1"/>
-          </a:fillRef>
-          <a:effectRef idx="2">
-            <a:schemeClr val="accent1"/>
-          </a:effectRef>
-          <a:fontRef idx="minor">
-            <a:schemeClr val="lt1"/>
-          </a:fontRef>
-        </p:style>
-        <p:txBody>
-          <a:bodyPr rtlCol="0" anchor="ctr"/>
-          <a:lstStyle/>
-          <a:p>
-            <a:pPr algn="ctr"/>
-          </a:p>
-        </p:txBody>
-      </p:sp>
-      <p:sp>
-        <p:nvSpPr>
-          <p:cNvPr id="3" name="TextBox 2"/>
-          <p:cNvSpPr txBox="1"/>
-          <p:nvPr/>
-        </p:nvSpPr>
-        <p:spPr>
-          <a:xfrm>
-            <a:off x="164592" y="109728"/>
-            <a:ext cx="8814816" cy="6638544"/>
-          </a:xfrm>
-          <a:prstGeom prst="rect">
-            <a:avLst/>
-          </a:prstGeom>
-          <a:noFill/>
-        </p:spPr>
-        <p:txBody>
-          <a:bodyPr wrap="square">
-            <a:noAutofit/>
-          </a:bodyPr>
-          <a:lstStyle/>
-          <a:p>
-            <a:pPr>
-              <a:lnSpc>
-                <a:spcPct val="95000"/>
-              </a:lnSpc>
-              <a:spcBef>
-                <a:spcPts val="0"/>
-              </a:spcBef>
-              <a:spcAft>
-                <a:spcPts val="0"/>
-              </a:spcAft>
-            </a:pPr>
-            <a:r>
-              <a:rPr sz="1600">
-                <a:solidFill>
-                  <a:srgbClr val="DCDCDC"/>
-                </a:solidFill>
-                <a:latin typeface="Consolas"/>
-              </a:rPr>
-              <a:t>    </a:t>
-            </a:r>
-            <a:r>
-              <a:rPr sz="1600">
-                <a:solidFill>
-                  <a:srgbClr val="DCDCAA"/>
-                </a:solidFill>
-                <a:latin typeface="Consolas"/>
-              </a:rPr>
-              <a:t>assert_eq!</a:t>
-            </a:r>
-            <a:r>
-              <a:rPr sz="1600">
-                <a:solidFill>
-                  <a:srgbClr val="DCDCDC"/>
-                </a:solidFill>
-                <a:latin typeface="Consolas"/>
-              </a:rPr>
-              <a:t>(</a:t>
-            </a:r>
-            <a:r>
-              <a:rPr sz="1600">
-                <a:solidFill>
-                  <a:srgbClr val="DCDCDC"/>
-                </a:solidFill>
-                <a:latin typeface="Consolas"/>
-              </a:rPr>
-              <a:t>default_level</a:t>
-            </a:r>
-            <a:r>
-              <a:rPr sz="1600">
-                <a:solidFill>
-                  <a:srgbClr val="DCDCDC"/>
-                </a:solidFill>
-                <a:latin typeface="Consolas"/>
-              </a:rPr>
-              <a:t>,</a:t>
-            </a:r>
-            <a:r>
-              <a:rPr sz="1600">
-                <a:solidFill>
-                  <a:srgbClr val="DCDCDC"/>
-                </a:solidFill>
-                <a:latin typeface="Consolas"/>
-              </a:rPr>
-              <a:t> </a:t>
-            </a:r>
-            <a:r>
-              <a:rPr sz="1600">
-                <a:solidFill>
-                  <a:srgbClr val="DCDCDC"/>
-                </a:solidFill>
-                <a:latin typeface="Consolas"/>
-              </a:rPr>
-              <a:t>LedLevel</a:t>
-            </a:r>
-            <a:r>
-              <a:rPr sz="1600">
-                <a:solidFill>
-                  <a:srgbClr val="DCDCDC"/>
-                </a:solidFill>
-                <a:latin typeface="Consolas"/>
-              </a:rPr>
-              <a:t>::</a:t>
-            </a:r>
-            <a:r>
-              <a:rPr sz="1600">
-                <a:solidFill>
-                  <a:srgbClr val="DCDCDC"/>
-                </a:solidFill>
-                <a:latin typeface="Consolas"/>
-              </a:rPr>
-              <a:t>Off</a:t>
-            </a:r>
-            <a:r>
-              <a:rPr sz="1600">
-                <a:solidFill>
-                  <a:srgbClr val="DCDCDC"/>
-                </a:solidFill>
-                <a:latin typeface="Consolas"/>
-              </a:rPr>
-              <a:t>)</a:t>
-            </a:r>
-            <a:r>
-              <a:rPr sz="1600">
-                <a:solidFill>
-                  <a:srgbClr val="DCDCDC"/>
-                </a:solidFill>
-                <a:latin typeface="Consolas"/>
-              </a:rPr>
-              <a:t>;</a:t>
-            </a:r>
-          </a:p>
-          <a:p>
-            <a:pPr>
-              <a:lnSpc>
-                <a:spcPct val="95000"/>
-              </a:lnSpc>
-              <a:spcBef>
-                <a:spcPts val="0"/>
-              </a:spcBef>
-              <a:spcAft>
-                <a:spcPts val="0"/>
-              </a:spcAft>
-            </a:pPr>
-            <a:r>
-              <a:rPr sz="1600">
-                <a:solidFill>
-                  <a:srgbClr val="DCDCDC"/>
-                </a:solidFill>
-                <a:latin typeface="Consolas"/>
-              </a:rPr>
-              <a:t>    </a:t>
-            </a:r>
-            <a:r>
-              <a:rPr sz="1600">
-                <a:solidFill>
-                  <a:srgbClr val="DCDCAA"/>
-                </a:solidFill>
-                <a:latin typeface="Consolas"/>
-              </a:rPr>
-              <a:t>assert_ne!</a:t>
-            </a:r>
-            <a:r>
-              <a:rPr sz="1600">
-                <a:solidFill>
-                  <a:srgbClr val="DCDCDC"/>
-                </a:solidFill>
-                <a:latin typeface="Consolas"/>
-              </a:rPr>
-              <a:t>(</a:t>
-            </a:r>
-            <a:r>
-              <a:rPr sz="1600">
-                <a:solidFill>
-                  <a:srgbClr val="DCDCDC"/>
-                </a:solidFill>
-                <a:latin typeface="Consolas"/>
-              </a:rPr>
-              <a:t>on</a:t>
-            </a:r>
-            <a:r>
-              <a:rPr sz="1600">
-                <a:solidFill>
-                  <a:srgbClr val="DCDCDC"/>
-                </a:solidFill>
-                <a:latin typeface="Consolas"/>
-              </a:rPr>
-              <a:t>,</a:t>
-            </a:r>
-            <a:r>
-              <a:rPr sz="1600">
-                <a:solidFill>
-                  <a:srgbClr val="DCDCDC"/>
-                </a:solidFill>
-                <a:latin typeface="Consolas"/>
-              </a:rPr>
-              <a:t> </a:t>
-            </a:r>
-            <a:r>
-              <a:rPr sz="1600">
-                <a:solidFill>
-                  <a:srgbClr val="DCDCDC"/>
-                </a:solidFill>
-                <a:latin typeface="Consolas"/>
-              </a:rPr>
-              <a:t>off</a:t>
-            </a:r>
-            <a:r>
-              <a:rPr sz="1600">
-                <a:solidFill>
-                  <a:srgbClr val="DCDCDC"/>
-                </a:solidFill>
-                <a:latin typeface="Consolas"/>
-              </a:rPr>
-              <a:t>)</a:t>
-            </a:r>
-            <a:r>
-              <a:rPr sz="1600">
-                <a:solidFill>
-                  <a:srgbClr val="DCDCDC"/>
-                </a:solidFill>
-                <a:latin typeface="Consolas"/>
-              </a:rPr>
-              <a:t>;</a:t>
-            </a:r>
-          </a:p>
-          <a:p>
-            <a:pPr>
-              <a:lnSpc>
-                <a:spcPct val="95000"/>
-              </a:lnSpc>
-              <a:spcBef>
-                <a:spcPts val="0"/>
-              </a:spcBef>
-              <a:spcAft>
-                <a:spcPts val="0"/>
-              </a:spcAft>
-            </a:pPr>
-            <a:r>
-              <a:rPr sz="1600">
-                <a:solidFill>
-                  <a:srgbClr val="DCDCDC"/>
-                </a:solidFill>
-                <a:latin typeface="Consolas"/>
-              </a:rPr>
-              <a:t>    </a:t>
-            </a:r>
-            <a:r>
-              <a:rPr sz="1600">
-                <a:solidFill>
-                  <a:srgbClr val="DCDCAA"/>
-                </a:solidFill>
-                <a:latin typeface="Consolas"/>
-              </a:rPr>
-              <a:t>assert!</a:t>
-            </a:r>
-            <a:r>
-              <a:rPr sz="1600">
-                <a:solidFill>
-                  <a:srgbClr val="DCDCDC"/>
-                </a:solidFill>
-                <a:latin typeface="Consolas"/>
-              </a:rPr>
-              <a:t>(</a:t>
-            </a:r>
-            <a:r>
-              <a:rPr sz="1600">
-                <a:solidFill>
-                  <a:srgbClr val="DCDCDC"/>
-                </a:solidFill>
-                <a:latin typeface="Consolas"/>
-              </a:rPr>
-              <a:t>off</a:t>
-            </a:r>
-            <a:r>
-              <a:rPr sz="1600">
-                <a:solidFill>
-                  <a:srgbClr val="DCDCDC"/>
-                </a:solidFill>
-                <a:latin typeface="Consolas"/>
-              </a:rPr>
-              <a:t> </a:t>
-            </a:r>
-            <a:r>
-              <a:rPr sz="1600">
-                <a:solidFill>
-                  <a:srgbClr val="DCDCDC"/>
-                </a:solidFill>
-                <a:latin typeface="Consolas"/>
-              </a:rPr>
-              <a:t>&gt;</a:t>
-            </a:r>
-            <a:r>
-              <a:rPr sz="1600">
-                <a:solidFill>
-                  <a:srgbClr val="DCDCDC"/>
-                </a:solidFill>
-                <a:latin typeface="Consolas"/>
-              </a:rPr>
-              <a:t> </a:t>
-            </a:r>
-            <a:r>
-              <a:rPr sz="1600">
-                <a:solidFill>
-                  <a:srgbClr val="DCDCDC"/>
-                </a:solidFill>
-                <a:latin typeface="Consolas"/>
-              </a:rPr>
-              <a:t>on</a:t>
-            </a:r>
-            <a:r>
-              <a:rPr sz="1600">
-                <a:solidFill>
-                  <a:srgbClr val="DCDCDC"/>
-                </a:solidFill>
-                <a:latin typeface="Consolas"/>
-              </a:rPr>
-              <a:t>)</a:t>
-            </a:r>
-            <a:r>
-              <a:rPr sz="1600">
-                <a:solidFill>
-                  <a:srgbClr val="DCDCDC"/>
-                </a:solidFill>
-                <a:latin typeface="Consolas"/>
-              </a:rPr>
-              <a:t>;</a:t>
-            </a:r>
-          </a:p>
-          <a:p>
-            <a:pPr>
-              <a:lnSpc>
-                <a:spcPct val="95000"/>
-              </a:lnSpc>
-              <a:spcBef>
-                <a:spcPts val="0"/>
-              </a:spcBef>
-              <a:spcAft>
-                <a:spcPts val="0"/>
-              </a:spcAft>
-            </a:pPr>
-          </a:p>
-          <a:p>
-            <a:pPr>
-              <a:lnSpc>
-                <a:spcPct val="95000"/>
-              </a:lnSpc>
-              <a:spcBef>
-                <a:spcPts val="0"/>
-              </a:spcBef>
-              <a:spcAft>
-                <a:spcPts val="0"/>
-              </a:spcAft>
-            </a:pPr>
-            <a:r>
-              <a:rPr sz="1600">
-                <a:solidFill>
-                  <a:srgbClr val="DCDCDC"/>
-                </a:solidFill>
-                <a:latin typeface="Consolas"/>
-              </a:rPr>
-              <a:t>    </a:t>
-            </a:r>
-            <a:r>
-              <a:rPr sz="1600">
-                <a:solidFill>
-                  <a:srgbClr val="6A9955"/>
-                </a:solidFill>
-                <a:latin typeface="Consolas"/>
-              </a:rPr>
-              <a:t>// `Copy` + `Clone` come from derive too.</a:t>
-            </a:r>
-          </a:p>
-          <a:p>
-            <a:pPr>
-              <a:lnSpc>
-                <a:spcPct val="95000"/>
-              </a:lnSpc>
-              <a:spcBef>
-                <a:spcPts val="0"/>
-              </a:spcBef>
-              <a:spcAft>
-                <a:spcPts val="0"/>
-              </a:spcAft>
-            </a:pPr>
-            <a:r>
-              <a:rPr sz="1600">
-                <a:solidFill>
-                  <a:srgbClr val="DCDCDC"/>
-                </a:solidFill>
-                <a:latin typeface="Consolas"/>
-              </a:rPr>
-              <a:t>    </a:t>
-            </a:r>
-            <a:r>
-              <a:rPr sz="1600">
-                <a:solidFill>
-                  <a:srgbClr val="C586C0"/>
-                </a:solidFill>
-                <a:latin typeface="Consolas"/>
-              </a:rPr>
-              <a:t>let</a:t>
-            </a:r>
-            <a:r>
-              <a:rPr sz="1600">
-                <a:solidFill>
-                  <a:srgbClr val="DCDCDC"/>
-                </a:solidFill>
-                <a:latin typeface="Consolas"/>
-              </a:rPr>
-              <a:t> </a:t>
-            </a:r>
-            <a:r>
-              <a:rPr sz="1600">
-                <a:solidFill>
-                  <a:srgbClr val="DCDCDC"/>
-                </a:solidFill>
-                <a:latin typeface="Consolas"/>
-              </a:rPr>
-              <a:t>copied</a:t>
-            </a:r>
-            <a:r>
-              <a:rPr sz="1600">
-                <a:solidFill>
-                  <a:srgbClr val="DCDCDC"/>
-                </a:solidFill>
-                <a:latin typeface="Consolas"/>
-              </a:rPr>
-              <a:t> </a:t>
-            </a:r>
-            <a:r>
-              <a:rPr sz="1600">
-                <a:solidFill>
-                  <a:srgbClr val="DCDCDC"/>
-                </a:solidFill>
-                <a:latin typeface="Consolas"/>
-              </a:rPr>
-              <a:t>=</a:t>
-            </a:r>
-            <a:r>
-              <a:rPr sz="1600">
-                <a:solidFill>
-                  <a:srgbClr val="DCDCDC"/>
-                </a:solidFill>
-                <a:latin typeface="Consolas"/>
-              </a:rPr>
-              <a:t> </a:t>
-            </a:r>
-            <a:r>
-              <a:rPr sz="1600">
-                <a:solidFill>
-                  <a:srgbClr val="DCDCDC"/>
-                </a:solidFill>
-                <a:latin typeface="Consolas"/>
-              </a:rPr>
-              <a:t>on</a:t>
-            </a:r>
-            <a:r>
-              <a:rPr sz="1600">
-                <a:solidFill>
-                  <a:srgbClr val="DCDCDC"/>
-                </a:solidFill>
-                <a:latin typeface="Consolas"/>
-              </a:rPr>
-              <a:t>;</a:t>
-            </a:r>
-          </a:p>
-          <a:p>
-            <a:pPr>
-              <a:lnSpc>
-                <a:spcPct val="95000"/>
-              </a:lnSpc>
-              <a:spcBef>
-                <a:spcPts val="0"/>
-              </a:spcBef>
-              <a:spcAft>
-                <a:spcPts val="0"/>
-              </a:spcAft>
-            </a:pPr>
-            <a:r>
-              <a:rPr sz="1600">
-                <a:solidFill>
-                  <a:srgbClr val="DCDCDC"/>
-                </a:solidFill>
-                <a:latin typeface="Consolas"/>
-              </a:rPr>
-              <a:t>    </a:t>
-            </a:r>
-            <a:r>
-              <a:rPr sz="1600">
-                <a:solidFill>
-                  <a:srgbClr val="C586C0"/>
-                </a:solidFill>
-                <a:latin typeface="Consolas"/>
-              </a:rPr>
-              <a:t>let</a:t>
-            </a:r>
-            <a:r>
-              <a:rPr sz="1600">
-                <a:solidFill>
-                  <a:srgbClr val="DCDCDC"/>
-                </a:solidFill>
-                <a:latin typeface="Consolas"/>
-              </a:rPr>
-              <a:t> </a:t>
-            </a:r>
-            <a:r>
-              <a:rPr sz="1600">
-                <a:solidFill>
-                  <a:srgbClr val="DCDCDC"/>
-                </a:solidFill>
-                <a:latin typeface="Consolas"/>
-              </a:rPr>
-              <a:t>cloned</a:t>
-            </a:r>
-            <a:r>
-              <a:rPr sz="1600">
-                <a:solidFill>
-                  <a:srgbClr val="DCDCDC"/>
-                </a:solidFill>
-                <a:latin typeface="Consolas"/>
-              </a:rPr>
-              <a:t> </a:t>
-            </a:r>
-            <a:r>
-              <a:rPr sz="1600">
-                <a:solidFill>
-                  <a:srgbClr val="DCDCDC"/>
-                </a:solidFill>
-                <a:latin typeface="Consolas"/>
-              </a:rPr>
-              <a:t>=</a:t>
-            </a:r>
-            <a:r>
-              <a:rPr sz="1600">
-                <a:solidFill>
-                  <a:srgbClr val="DCDCDC"/>
-                </a:solidFill>
-                <a:latin typeface="Consolas"/>
-              </a:rPr>
-              <a:t> </a:t>
-            </a:r>
-            <a:r>
-              <a:rPr sz="1600">
-                <a:solidFill>
-                  <a:srgbClr val="DCDCDC"/>
-                </a:solidFill>
-                <a:latin typeface="Consolas"/>
-              </a:rPr>
-              <a:t>off</a:t>
-            </a:r>
-            <a:r>
-              <a:rPr sz="1600">
-                <a:solidFill>
-                  <a:srgbClr val="DCDCDC"/>
-                </a:solidFill>
-                <a:latin typeface="Consolas"/>
-              </a:rPr>
-              <a:t>.</a:t>
-            </a:r>
-            <a:r>
-              <a:rPr sz="1600">
-                <a:solidFill>
-                  <a:srgbClr val="DCDCDC"/>
-                </a:solidFill>
-                <a:latin typeface="Consolas"/>
-              </a:rPr>
-              <a:t>clone</a:t>
-            </a:r>
-            <a:r>
-              <a:rPr sz="1600">
-                <a:solidFill>
-                  <a:srgbClr val="DCDCDC"/>
-                </a:solidFill>
-                <a:latin typeface="Consolas"/>
-              </a:rPr>
-              <a:t>(</a:t>
-            </a:r>
-            <a:r>
-              <a:rPr sz="1600">
-                <a:solidFill>
-                  <a:srgbClr val="DCDCDC"/>
-                </a:solidFill>
-                <a:latin typeface="Consolas"/>
-              </a:rPr>
-              <a:t>)</a:t>
-            </a:r>
-            <a:r>
-              <a:rPr sz="1600">
-                <a:solidFill>
-                  <a:srgbClr val="DCDCDC"/>
-                </a:solidFill>
-                <a:latin typeface="Consolas"/>
-              </a:rPr>
-              <a:t>;</a:t>
-            </a:r>
-          </a:p>
-          <a:p>
-            <a:pPr>
-              <a:lnSpc>
-                <a:spcPct val="95000"/>
-              </a:lnSpc>
-              <a:spcBef>
-                <a:spcPts val="0"/>
-              </a:spcBef>
-              <a:spcAft>
-                <a:spcPts val="0"/>
-              </a:spcAft>
-            </a:pPr>
-            <a:r>
-              <a:rPr sz="1600">
-                <a:solidFill>
-                  <a:srgbClr val="DCDCDC"/>
-                </a:solidFill>
-                <a:latin typeface="Consolas"/>
-              </a:rPr>
-              <a:t>    </a:t>
-            </a:r>
-            <a:r>
-              <a:rPr sz="1600">
-                <a:solidFill>
-                  <a:srgbClr val="DCDCAA"/>
-                </a:solidFill>
-                <a:latin typeface="Consolas"/>
-              </a:rPr>
-              <a:t>assert_eq!</a:t>
-            </a:r>
-            <a:r>
-              <a:rPr sz="1600">
-                <a:solidFill>
-                  <a:srgbClr val="DCDCDC"/>
-                </a:solidFill>
-                <a:latin typeface="Consolas"/>
-              </a:rPr>
-              <a:t>(</a:t>
-            </a:r>
-            <a:r>
-              <a:rPr sz="1600">
-                <a:solidFill>
-                  <a:srgbClr val="DCDCDC"/>
-                </a:solidFill>
-                <a:latin typeface="Consolas"/>
-              </a:rPr>
-              <a:t>copied</a:t>
-            </a:r>
-            <a:r>
-              <a:rPr sz="1600">
-                <a:solidFill>
-                  <a:srgbClr val="DCDCDC"/>
-                </a:solidFill>
-                <a:latin typeface="Consolas"/>
-              </a:rPr>
-              <a:t>,</a:t>
-            </a:r>
-            <a:r>
-              <a:rPr sz="1600">
-                <a:solidFill>
-                  <a:srgbClr val="DCDCDC"/>
-                </a:solidFill>
-                <a:latin typeface="Consolas"/>
-              </a:rPr>
-              <a:t> </a:t>
-            </a:r>
-            <a:r>
-              <a:rPr sz="1600">
-                <a:solidFill>
-                  <a:srgbClr val="DCDCDC"/>
-                </a:solidFill>
-                <a:latin typeface="Consolas"/>
-              </a:rPr>
-              <a:t>on</a:t>
-            </a:r>
-            <a:r>
-              <a:rPr sz="1600">
-                <a:solidFill>
-                  <a:srgbClr val="DCDCDC"/>
-                </a:solidFill>
-                <a:latin typeface="Consolas"/>
-              </a:rPr>
-              <a:t>)</a:t>
-            </a:r>
-            <a:r>
-              <a:rPr sz="1600">
-                <a:solidFill>
-                  <a:srgbClr val="DCDCDC"/>
-                </a:solidFill>
-                <a:latin typeface="Consolas"/>
-              </a:rPr>
-              <a:t>;</a:t>
-            </a:r>
-          </a:p>
-          <a:p>
-            <a:pPr>
-              <a:lnSpc>
-                <a:spcPct val="95000"/>
-              </a:lnSpc>
-              <a:spcBef>
-                <a:spcPts val="0"/>
-              </a:spcBef>
-              <a:spcAft>
-                <a:spcPts val="0"/>
-              </a:spcAft>
-            </a:pPr>
-            <a:r>
-              <a:rPr sz="1600">
-                <a:solidFill>
-                  <a:srgbClr val="DCDCDC"/>
-                </a:solidFill>
-                <a:latin typeface="Consolas"/>
-              </a:rPr>
-              <a:t>    </a:t>
-            </a:r>
-            <a:r>
-              <a:rPr sz="1600">
-                <a:solidFill>
-                  <a:srgbClr val="DCDCAA"/>
-                </a:solidFill>
-                <a:latin typeface="Consolas"/>
-              </a:rPr>
-              <a:t>assert_eq!</a:t>
-            </a:r>
-            <a:r>
-              <a:rPr sz="1600">
-                <a:solidFill>
-                  <a:srgbClr val="DCDCDC"/>
-                </a:solidFill>
-                <a:latin typeface="Consolas"/>
-              </a:rPr>
-              <a:t>(</a:t>
-            </a:r>
-            <a:r>
-              <a:rPr sz="1600">
-                <a:solidFill>
-                  <a:srgbClr val="DCDCDC"/>
-                </a:solidFill>
-                <a:latin typeface="Consolas"/>
-              </a:rPr>
-              <a:t>cloned</a:t>
-            </a:r>
-            <a:r>
-              <a:rPr sz="1600">
-                <a:solidFill>
-                  <a:srgbClr val="DCDCDC"/>
-                </a:solidFill>
-                <a:latin typeface="Consolas"/>
-              </a:rPr>
-              <a:t>,</a:t>
-            </a:r>
-            <a:r>
-              <a:rPr sz="1600">
-                <a:solidFill>
-                  <a:srgbClr val="DCDCDC"/>
-                </a:solidFill>
-                <a:latin typeface="Consolas"/>
-              </a:rPr>
-              <a:t> </a:t>
-            </a:r>
-            <a:r>
-              <a:rPr sz="1600">
-                <a:solidFill>
-                  <a:srgbClr val="DCDCDC"/>
-                </a:solidFill>
-                <a:latin typeface="Consolas"/>
-              </a:rPr>
-              <a:t>off</a:t>
-            </a:r>
-            <a:r>
-              <a:rPr sz="1600">
-                <a:solidFill>
-                  <a:srgbClr val="DCDCDC"/>
-                </a:solidFill>
-                <a:latin typeface="Consolas"/>
-              </a:rPr>
-              <a:t>)</a:t>
-            </a:r>
-            <a:r>
-              <a:rPr sz="1600">
-                <a:solidFill>
-                  <a:srgbClr val="DCDCDC"/>
-                </a:solidFill>
-                <a:latin typeface="Consolas"/>
-              </a:rPr>
-              <a:t>;</a:t>
-            </a:r>
-          </a:p>
-          <a:p>
-            <a:pPr>
-              <a:lnSpc>
-                <a:spcPct val="95000"/>
-              </a:lnSpc>
-              <a:spcBef>
-                <a:spcPts val="0"/>
-              </a:spcBef>
-              <a:spcAft>
-                <a:spcPts val="0"/>
-              </a:spcAft>
-            </a:pPr>
-            <a:r>
-              <a:rPr sz="1600">
-                <a:solidFill>
-                  <a:srgbClr val="DCDCDC"/>
+                  <a:srgbClr val="BAC2DE"/>
                 </a:solidFill>
                 <a:latin typeface="Consolas"/>
               </a:rPr>

--- a/docs/example4_walkthrough.pptx
+++ b/docs/example4_walkthrough.pptx
@@ -3867,7 +3867,7 @@
             <a:r>
               <a:rPr sz="1600">
                 <a:solidFill>
-                  <a:srgbClr val="EEFFFF"/>
+                  <a:srgbClr val="BAC2DE"/>
                 </a:solidFill>
                 <a:latin typeface="Consolas"/>
               </a:rPr>
@@ -3997,7 +3997,7 @@
             <a:r>
               <a:rPr sz="1600">
                 <a:solidFill>
-                  <a:srgbClr val="EEFFFF"/>
+                  <a:srgbClr val="BAC2DE"/>
                 </a:solidFill>
                 <a:latin typeface="Consolas"/>
               </a:rPr>
@@ -4109,7 +4109,7 @@
             <a:r>
               <a:rPr sz="1600">
                 <a:solidFill>
-                  <a:srgbClr val="EEFFFF"/>
+                  <a:srgbClr val="BAC2DE"/>
                 </a:solidFill>
                 <a:latin typeface="Consolas"/>
               </a:rPr>
@@ -4225,7 +4225,7 @@
             <a:r>
               <a:rPr sz="1600">
                 <a:solidFill>
-                  <a:srgbClr val="EEFFFF"/>
+                  <a:srgbClr val="BAC2DE"/>
                 </a:solidFill>
                 <a:latin typeface="Consolas"/>
               </a:rPr>

--- a/docs/example4_walkthrough.pptx
+++ b/docs/example4_walkthrough.pptx
@@ -8,7 +8,7 @@
     <p:sldId id="256" r:id="rId7"/>
     <p:sldId id="257" r:id="rId8"/>
   </p:sldIdLst>
-  <p:sldSz cx="9144000" cy="6858000" type="screen4x3"/>
+  <p:sldSz cx="12192000" cy="6858000" type="screen4x3"/>
   <p:notesSz cx="6858000" cy="9144000"/>
   <p:defaultTextStyle>
     <a:defPPr>
@@ -3098,7 +3098,7 @@
         <p:spPr>
           <a:xfrm>
             <a:off x="0" y="0"/>
-            <a:ext cx="9144000" cy="6858000"/>
+            <a:ext cx="12192000" cy="6858000"/>
           </a:xfrm>
           <a:prstGeom prst="rect">
             <a:avLst/>
@@ -3140,7 +3140,7 @@
         </p:nvSpPr>
         <p:spPr>
           <a:xfrm>
-            <a:off x="7543800" y="0"/>
+            <a:off x="10591800" y="0"/>
             <a:ext cx="1600200" cy="6858000"/>
           </a:xfrm>
           <a:prstGeom prst="rect">
@@ -3185,7 +3185,7 @@
         </p:nvSpPr>
         <p:spPr>
           <a:xfrm rot="16200000">
-            <a:off x="7616952" y="274320"/>
+            <a:off x="10664952" y="274320"/>
             <a:ext cx="1453896" cy="6309360"/>
           </a:xfrm>
           <a:prstGeom prst="rect">
@@ -3222,7 +3222,7 @@
         <p:spPr>
           <a:xfrm>
             <a:off x="731520" y="502920"/>
-            <a:ext cx="6446520" cy="1051560"/>
+            <a:ext cx="9494520" cy="1051560"/>
           </a:xfrm>
           <a:prstGeom prst="rect">
             <a:avLst/>
@@ -3318,7 +3318,7 @@
         <p:spPr>
           <a:xfrm>
             <a:off x="274319" y="1691640"/>
-            <a:ext cx="6995160" cy="2881934"/>
+            <a:ext cx="10043160" cy="4137679"/>
           </a:xfrm>
           <a:prstGeom prst="rect">
             <a:avLst/>
@@ -3352,7 +3352,7 @@
         <p:spPr>
           <a:xfrm>
             <a:off x="0" y="0"/>
-            <a:ext cx="9144000" cy="6858000"/>
+            <a:ext cx="12192000" cy="6858000"/>
           </a:xfrm>
           <a:prstGeom prst="rect">
             <a:avLst/>
@@ -3395,7 +3395,7 @@
         <p:spPr>
           <a:xfrm>
             <a:off x="164592" y="109728"/>
-            <a:ext cx="8814816" cy="6638544"/>
+            <a:ext cx="11862816" cy="6638544"/>
           </a:xfrm>
           <a:prstGeom prst="rect">
             <a:avLst/>
